--- a/ChainesPuissance.pptx
+++ b/ChainesPuissance.pptx
@@ -5,7 +5,7 @@
     <p:sldMasterId id="2147483660" r:id="rId1"/>
   </p:sldMasterIdLst>
   <p:notesMasterIdLst>
-    <p:notesMasterId r:id="rId14"/>
+    <p:notesMasterId r:id="rId15"/>
   </p:notesMasterIdLst>
   <p:sldIdLst>
     <p:sldId id="259" r:id="rId2"/>
@@ -20,6 +20,7 @@
     <p:sldId id="269" r:id="rId11"/>
     <p:sldId id="270" r:id="rId12"/>
     <p:sldId id="271" r:id="rId13"/>
+    <p:sldId id="272" r:id="rId14"/>
   </p:sldIdLst>
   <p:sldSz cx="12192000" cy="6858000"/>
   <p:notesSz cx="7315200" cy="9601200"/>
@@ -222,7 +223,7 @@
           <a:p>
             <a:fld id="{D157349C-AD05-44FA-B790-D9BBD62C4832}" type="datetimeFigureOut">
               <a:rPr lang="fr-FR" smtClean="0"/>
-              <a:t>04/06/2024</a:t>
+              <a:t>21/09/2026</a:t>
             </a:fld>
             <a:endParaRPr lang="fr-FR"/>
           </a:p>
@@ -734,7 +735,7 @@
           <a:p>
             <a:fld id="{CCF538C2-C309-4752-87A7-D2071D6CAC7F}" type="datetime1">
               <a:rPr lang="fr-FR" smtClean="0"/>
-              <a:t>04/06/2024</a:t>
+              <a:t>21/09/2026</a:t>
             </a:fld>
             <a:endParaRPr lang="fr-FR"/>
           </a:p>
@@ -939,7 +940,7 @@
           <a:p>
             <a:fld id="{F926C4FD-C1E6-452C-A858-BFBBC7496631}" type="datetime1">
               <a:rPr lang="fr-FR" smtClean="0"/>
-              <a:t>04/06/2024</a:t>
+              <a:t>21/09/2026</a:t>
             </a:fld>
             <a:endParaRPr lang="fr-FR"/>
           </a:p>
@@ -1195,7 +1196,7 @@
           <a:p>
             <a:fld id="{CEF75A8D-5F26-4754-844B-E2D9F6FC4950}" type="datetime1">
               <a:rPr lang="fr-FR" smtClean="0"/>
-              <a:t>04/06/2024</a:t>
+              <a:t>21/09/2026</a:t>
             </a:fld>
             <a:endParaRPr lang="fr-FR"/>
           </a:p>
@@ -1369,7 +1370,7 @@
           <a:p>
             <a:fld id="{FE352A31-E2A5-4F8A-BDFE-A9BA369B67E9}" type="datetime1">
               <a:rPr lang="fr-FR" smtClean="0"/>
-              <a:t>04/06/2024</a:t>
+              <a:t>21/09/2026</a:t>
             </a:fld>
             <a:endParaRPr lang="fr-FR"/>
           </a:p>
@@ -1731,7 +1732,7 @@
           <a:p>
             <a:fld id="{F1707E18-E4F4-4E6D-951C-B01FC69E66C0}" type="datetime1">
               <a:rPr lang="fr-FR" smtClean="0"/>
-              <a:t>04/06/2024</a:t>
+              <a:t>21/09/2026</a:t>
             </a:fld>
             <a:endParaRPr lang="fr-FR"/>
           </a:p>
@@ -2006,7 +2007,7 @@
           <a:p>
             <a:fld id="{93E4B9C8-F394-498B-8C66-049FACC1ED86}" type="datetime1">
               <a:rPr lang="fr-FR" smtClean="0"/>
-              <a:t>04/06/2024</a:t>
+              <a:t>21/09/2026</a:t>
             </a:fld>
             <a:endParaRPr lang="fr-FR"/>
           </a:p>
@@ -2385,7 +2386,7 @@
           <a:p>
             <a:fld id="{35950896-C41B-455D-9FAE-80943DD0CAEF}" type="datetime1">
               <a:rPr lang="fr-FR" smtClean="0"/>
-              <a:t>04/06/2024</a:t>
+              <a:t>21/09/2026</a:t>
             </a:fld>
             <a:endParaRPr lang="fr-FR"/>
           </a:p>
@@ -2503,7 +2504,7 @@
           <a:p>
             <a:fld id="{2BE2B735-22CE-433C-8BA6-DF0B28588E1F}" type="datetime1">
               <a:rPr lang="fr-FR" smtClean="0"/>
-              <a:t>04/06/2024</a:t>
+              <a:t>21/09/2026</a:t>
             </a:fld>
             <a:endParaRPr lang="fr-FR"/>
           </a:p>
@@ -2677,7 +2678,7 @@
           <a:p>
             <a:fld id="{5B475E59-9936-4413-84C5-14169665FDED}" type="datetime1">
               <a:rPr lang="fr-FR" smtClean="0"/>
-              <a:t>04/06/2024</a:t>
+              <a:t>21/09/2026</a:t>
             </a:fld>
             <a:endParaRPr lang="fr-FR"/>
           </a:p>
@@ -3034,7 +3035,7 @@
           <a:p>
             <a:fld id="{42662320-E9E6-45B0-8B93-5727AA5FFC46}" type="datetime1">
               <a:rPr lang="fr-FR" smtClean="0"/>
-              <a:t>04/06/2024</a:t>
+              <a:t>21/09/2026</a:t>
             </a:fld>
             <a:endParaRPr lang="fr-FR"/>
           </a:p>
@@ -3419,7 +3420,7 @@
           <a:p>
             <a:fld id="{9A545382-D50F-43E8-AFFD-788FD552C87C}" type="datetime1">
               <a:rPr lang="fr-FR" smtClean="0"/>
-              <a:t>04/06/2024</a:t>
+              <a:t>21/09/2026</a:t>
             </a:fld>
             <a:endParaRPr lang="fr-FR"/>
           </a:p>
@@ -3542,6 +3543,13 @@
             <a:schemeClr val="lt1"/>
           </a:fontRef>
         </p:style>
+        <p:txBody>
+          <a:bodyPr/>
+          <a:lstStyle/>
+          <a:p>
+            <a:endParaRPr lang="fr-FR"/>
+          </a:p>
+        </p:txBody>
       </p:sp>
       <p:sp>
         <p:nvSpPr>
@@ -3580,6 +3588,13 @@
             <a:schemeClr val="lt1"/>
           </a:fontRef>
         </p:style>
+        <p:txBody>
+          <a:bodyPr/>
+          <a:lstStyle/>
+          <a:p>
+            <a:endParaRPr lang="fr-FR"/>
+          </a:p>
+        </p:txBody>
       </p:sp>
       <p:sp>
         <p:nvSpPr>
@@ -3709,7 +3724,7 @@
           <a:p>
             <a:fld id="{4F030BD8-D1C7-406A-AB04-4944ABBF0A3E}" type="datetime1">
               <a:rPr lang="fr-FR" smtClean="0"/>
-              <a:t>04/06/2024</a:t>
+              <a:t>21/09/2026</a:t>
             </a:fld>
             <a:endParaRPr lang="fr-FR" dirty="0"/>
           </a:p>
@@ -5807,7 +5822,7 @@
         </p:nvGrpSpPr>
         <p:grpSpPr>
           <a:xfrm>
-            <a:off x="1596905" y="3874910"/>
+            <a:off x="510604" y="3934472"/>
             <a:ext cx="360000" cy="360000"/>
             <a:chOff x="4197400" y="3547713"/>
             <a:chExt cx="1800000" cy="1800000"/>
@@ -7664,14 +7679,11 @@
                 <a:pPr/>
                 <a14:m>
                   <m:oMathPara xmlns:m="http://schemas.openxmlformats.org/officeDocument/2006/math">
-                    <m:oMathParaPr>
-                      <m:jc m:val="centerGroup"/>
-                    </m:oMathParaPr>
-                    <m:oMath xmlns:m="http://schemas.openxmlformats.org/officeDocument/2006/math">
+                    <m:oMath>
                       <m:sSub>
                         <m:sSubPr>
                           <m:ctrlPr>
-                            <a:rPr lang="fr-FR" sz="1050" b="0" i="1" smtClean="0">
+                            <a:rPr lang="fr-FR" sz="1050" i="1" smtClean="0">
                               <a:latin typeface="Cambria Math" panose="02040503050406030204" pitchFamily="18" charset="0"/>
                               <a:ea typeface="Cambria Math" panose="02040503050406030204" pitchFamily="18" charset="0"/>
                             </a:rPr>
@@ -7784,14 +7796,11 @@
                 <a:pPr/>
                 <a14:m>
                   <m:oMathPara xmlns:m="http://schemas.openxmlformats.org/officeDocument/2006/math">
-                    <m:oMathParaPr>
-                      <m:jc m:val="centerGroup"/>
-                    </m:oMathParaPr>
-                    <m:oMath xmlns:m="http://schemas.openxmlformats.org/officeDocument/2006/math">
+                    <m:oMath>
                       <m:sSub>
                         <m:sSubPr>
                           <m:ctrlPr>
-                            <a:rPr lang="fr-FR" sz="1050" b="0" i="1" smtClean="0">
+                            <a:rPr lang="fr-FR" sz="1050" i="1" smtClean="0">
                               <a:latin typeface="Cambria Math" panose="02040503050406030204" pitchFamily="18" charset="0"/>
                               <a:ea typeface="Cambria Math" panose="02040503050406030204" pitchFamily="18" charset="0"/>
                             </a:rPr>
@@ -7904,14 +7913,11 @@
                 <a:pPr/>
                 <a14:m>
                   <m:oMathPara xmlns:m="http://schemas.openxmlformats.org/officeDocument/2006/math">
-                    <m:oMathParaPr>
-                      <m:jc m:val="centerGroup"/>
-                    </m:oMathParaPr>
-                    <m:oMath xmlns:m="http://schemas.openxmlformats.org/officeDocument/2006/math">
+                    <m:oMath>
                       <m:sSub>
                         <m:sSubPr>
                           <m:ctrlPr>
-                            <a:rPr lang="fr-FR" sz="1050" b="0" i="1" smtClean="0">
+                            <a:rPr lang="fr-FR" sz="1050" i="1" smtClean="0">
                               <a:latin typeface="Cambria Math" panose="02040503050406030204" pitchFamily="18" charset="0"/>
                               <a:ea typeface="Cambria Math" panose="02040503050406030204" pitchFamily="18" charset="0"/>
                             </a:rPr>
@@ -7974,7 +7980,7 @@
                       <m:sSub>
                         <m:sSubPr>
                           <m:ctrlPr>
-                            <a:rPr lang="fr-FR" sz="1050" b="0" i="1" smtClean="0">
+                            <a:rPr lang="fr-FR" sz="1050" b="0" i="0" smtClean="0">
                               <a:latin typeface="Cambria Math" panose="02040503050406030204" pitchFamily="18" charset="0"/>
                               <a:ea typeface="Cambria Math" panose="02040503050406030204" pitchFamily="18" charset="0"/>
                             </a:rPr>
@@ -8078,14 +8084,11 @@
                 <a:pPr/>
                 <a14:m>
                   <m:oMathPara xmlns:m="http://schemas.openxmlformats.org/officeDocument/2006/math">
-                    <m:oMathParaPr>
-                      <m:jc m:val="centerGroup"/>
-                    </m:oMathParaPr>
-                    <m:oMath xmlns:m="http://schemas.openxmlformats.org/officeDocument/2006/math">
+                    <m:oMath>
                       <m:sSub>
                         <m:sSubPr>
                           <m:ctrlPr>
-                            <a:rPr lang="fr-FR" sz="1050" b="0" i="1" smtClean="0">
+                            <a:rPr lang="fr-FR" sz="1050" i="1" smtClean="0">
                               <a:latin typeface="Cambria Math" panose="02040503050406030204" pitchFamily="18" charset="0"/>
                               <a:ea typeface="Cambria Math" panose="02040503050406030204" pitchFamily="18" charset="0"/>
                             </a:rPr>
@@ -8148,7 +8151,7 @@
                       <m:sSub>
                         <m:sSubPr>
                           <m:ctrlPr>
-                            <a:rPr lang="fr-FR" sz="1050" b="0" i="1" smtClean="0">
+                            <a:rPr lang="fr-FR" sz="1050" b="0" i="0" smtClean="0">
                               <a:latin typeface="Cambria Math" panose="02040503050406030204" pitchFamily="18" charset="0"/>
                               <a:ea typeface="Cambria Math" panose="02040503050406030204" pitchFamily="18" charset="0"/>
                             </a:rPr>
@@ -9628,7 +9631,7 @@
               <a:lstStyle/>
               <a:p>
                 <a:pPr algn="ctr"/>
-                <a:endParaRPr lang="fr-FR"/>
+                <a:endParaRPr lang="fr-FR" dirty="0"/>
               </a:p>
             </p:txBody>
           </p:sp>
@@ -9654,8 +9657,8 @@
             </p:blipFill>
             <p:spPr>
               <a:xfrm>
-                <a:off x="4526157" y="3876470"/>
-                <a:ext cx="1142486" cy="1142486"/>
+                <a:off x="4526155" y="3876468"/>
+                <a:ext cx="1142485" cy="1142485"/>
               </a:xfrm>
               <a:prstGeom prst="rect">
                 <a:avLst/>
@@ -14414,7 +14417,7 @@
         </p:nvGrpSpPr>
         <p:grpSpPr>
           <a:xfrm>
-            <a:off x="1596905" y="3760610"/>
+            <a:off x="475722" y="3853365"/>
             <a:ext cx="360000" cy="360000"/>
             <a:chOff x="4197400" y="3547713"/>
             <a:chExt cx="1800000" cy="1800000"/>
@@ -14503,36 +14506,6 @@
           </p:spPr>
         </p:pic>
       </p:grpSp>
-      <p:pic>
-        <p:nvPicPr>
-          <p:cNvPr id="28" name="Image 27">
-            <a:extLst>
-              <a:ext uri="{FF2B5EF4-FFF2-40B4-BE49-F238E27FC236}">
-                <a16:creationId xmlns:a16="http://schemas.microsoft.com/office/drawing/2014/main" id="{35145E60-25D8-7A86-65AE-7F3729EC7848}"/>
-              </a:ext>
-            </a:extLst>
-          </p:cNvPr>
-          <p:cNvPicPr>
-            <a:picLocks noChangeAspect="1"/>
-          </p:cNvPicPr>
-          <p:nvPr/>
-        </p:nvPicPr>
-        <p:blipFill>
-          <a:blip r:embed="rId5"/>
-          <a:stretch>
-            <a:fillRect/>
-          </a:stretch>
-        </p:blipFill>
-        <p:spPr>
-          <a:xfrm>
-            <a:off x="498044" y="3446765"/>
-            <a:ext cx="360000" cy="360000"/>
-          </a:xfrm>
-          <a:prstGeom prst="rect">
-            <a:avLst/>
-          </a:prstGeom>
-        </p:spPr>
-      </p:pic>
       <p:pic>
         <p:nvPicPr>
           <p:cNvPr id="29" name="Image 28">
@@ -15433,8 +15406,8 @@
           </a:prstGeom>
         </p:spPr>
       </p:pic>
-      <mc:AlternateContent xmlns:mc="http://schemas.openxmlformats.org/markup-compatibility/2006" xmlns:a14="http://schemas.microsoft.com/office/drawing/2010/main">
-        <mc:Choice Requires="a14">
+      <mc:AlternateContent xmlns:mc="http://schemas.openxmlformats.org/markup-compatibility/2006">
+        <mc:Choice xmlns:a14="http://schemas.microsoft.com/office/drawing/2010/main" Requires="a14">
           <p:sp>
             <p:nvSpPr>
               <p:cNvPr id="64" name="ZoneTexte 63">
@@ -15449,7 +15422,7 @@
             </p:nvSpPr>
             <p:spPr>
               <a:xfrm>
-                <a:off x="170158" y="3784816"/>
+                <a:off x="170158" y="3624796"/>
                 <a:ext cx="1161960" cy="276999"/>
               </a:xfrm>
               <a:prstGeom prst="rect">
@@ -15498,7 +15471,7 @@
             </p:txBody>
           </p:sp>
         </mc:Choice>
-        <mc:Fallback xmlns="">
+        <mc:Fallback>
           <p:sp>
             <p:nvSpPr>
               <p:cNvPr id="64" name="ZoneTexte 63">
@@ -15515,14 +15488,14 @@
             </p:nvSpPr>
             <p:spPr>
               <a:xfrm>
-                <a:off x="170158" y="3784816"/>
+                <a:off x="170158" y="3624796"/>
                 <a:ext cx="1161960" cy="276999"/>
               </a:xfrm>
               <a:prstGeom prst="rect">
                 <a:avLst/>
               </a:prstGeom>
               <a:blipFill>
-                <a:blip r:embed="rId9"/>
+                <a:blip r:embed="rId7"/>
                 <a:stretch>
                   <a:fillRect t="-2222" b="-17778"/>
                 </a:stretch>
@@ -15611,10 +15584,7 @@
                 <a:pPr algn="ctr"/>
                 <a14:m>
                   <m:oMathPara xmlns:m="http://schemas.openxmlformats.org/officeDocument/2006/math">
-                    <m:oMathParaPr>
-                      <m:jc m:val="centerGroup"/>
-                    </m:oMathParaPr>
-                    <m:oMath xmlns:m="http://schemas.openxmlformats.org/officeDocument/2006/math">
+                    <m:oMath>
                       <m:sSub>
                         <m:sSubPr>
                           <m:ctrlPr>
@@ -16569,10 +16539,7 @@
                 <a:pPr algn="ctr"/>
                 <a14:m>
                   <m:oMathPara xmlns:m="http://schemas.openxmlformats.org/officeDocument/2006/math">
-                    <m:oMathParaPr>
-                      <m:jc m:val="centerGroup"/>
-                    </m:oMathParaPr>
-                    <m:oMath xmlns:m="http://schemas.openxmlformats.org/officeDocument/2006/math">
+                    <m:oMath>
                       <m:sSub>
                         <m:sSubPr>
                           <m:ctrlPr>
@@ -16758,10 +16725,193 @@
           </a:prstGeom>
         </p:spPr>
       </p:pic>
+      <p:cxnSp>
+        <p:nvCxnSpPr>
+          <p:cNvPr id="40" name="Connecteur droit avec flèche 39">
+            <a:extLst>
+              <a:ext uri="{FF2B5EF4-FFF2-40B4-BE49-F238E27FC236}">
+                <a16:creationId xmlns:a16="http://schemas.microsoft.com/office/drawing/2014/main" id="{1BE30B18-1F26-6063-CADD-33D88F7654BA}"/>
+              </a:ext>
+            </a:extLst>
+          </p:cNvPr>
+          <p:cNvCxnSpPr>
+            <a:cxnSpLocks/>
+          </p:cNvCxnSpPr>
+          <p:nvPr/>
+        </p:nvCxnSpPr>
+        <p:spPr>
+          <a:xfrm flipV="1">
+            <a:off x="329592" y="3582128"/>
+            <a:ext cx="720000" cy="1536"/>
+          </a:xfrm>
+          <a:prstGeom prst="straightConnector1">
+            <a:avLst/>
+          </a:prstGeom>
+          <a:ln w="25400" cap="rnd">
+            <a:solidFill>
+              <a:srgbClr val="FDAD57"/>
+            </a:solidFill>
+            <a:tailEnd type="triangle" w="med" len="lg"/>
+          </a:ln>
+        </p:spPr>
+        <p:style>
+          <a:lnRef idx="1">
+            <a:schemeClr val="accent1"/>
+          </a:lnRef>
+          <a:fillRef idx="0">
+            <a:schemeClr val="accent1"/>
+          </a:fillRef>
+          <a:effectRef idx="0">
+            <a:schemeClr val="accent1"/>
+          </a:effectRef>
+          <a:fontRef idx="minor">
+            <a:schemeClr val="tx1"/>
+          </a:fontRef>
+        </p:style>
+      </p:cxnSp>
+      <p:pic>
+        <p:nvPicPr>
+          <p:cNvPr id="41" name="Image 40">
+            <a:extLst>
+              <a:ext uri="{FF2B5EF4-FFF2-40B4-BE49-F238E27FC236}">
+                <a16:creationId xmlns:a16="http://schemas.microsoft.com/office/drawing/2014/main" id="{BB7FAD38-600C-503C-8E32-CC7601D31178}"/>
+              </a:ext>
+            </a:extLst>
+          </p:cNvPr>
+          <p:cNvPicPr>
+            <a:picLocks noChangeAspect="1"/>
+          </p:cNvPicPr>
+          <p:nvPr/>
+        </p:nvPicPr>
+        <p:blipFill>
+          <a:blip r:embed="rId5"/>
+          <a:stretch>
+            <a:fillRect/>
+          </a:stretch>
+        </p:blipFill>
+        <p:spPr>
+          <a:xfrm>
+            <a:off x="497178" y="3164385"/>
+            <a:ext cx="360000" cy="360000"/>
+          </a:xfrm>
+          <a:prstGeom prst="rect">
+            <a:avLst/>
+          </a:prstGeom>
+        </p:spPr>
+      </p:pic>
     </p:spTree>
     <p:extLst>
       <p:ext uri="{BB962C8B-B14F-4D97-AF65-F5344CB8AC3E}">
         <p14:creationId xmlns:p14="http://schemas.microsoft.com/office/powerpoint/2010/main" val="727965944"/>
+      </p:ext>
+    </p:extLst>
+  </p:cSld>
+  <p:clrMapOvr>
+    <a:masterClrMapping/>
+  </p:clrMapOvr>
+</p:sld>
+</file>
+
+<file path=ppt/slides/slide13.xml><?xml version="1.0" encoding="utf-8"?>
+<p:sld xmlns:a="http://schemas.openxmlformats.org/drawingml/2006/main" xmlns:r="http://schemas.openxmlformats.org/officeDocument/2006/relationships" xmlns:p="http://schemas.openxmlformats.org/presentationml/2006/main">
+  <p:cSld>
+    <p:spTree>
+      <p:nvGrpSpPr>
+        <p:cNvPr id="1" name=""/>
+        <p:cNvGrpSpPr/>
+        <p:nvPr/>
+      </p:nvGrpSpPr>
+      <p:grpSpPr>
+        <a:xfrm>
+          <a:off x="0" y="0"/>
+          <a:ext cx="0" cy="0"/>
+          <a:chOff x="0" y="0"/>
+          <a:chExt cx="0" cy="0"/>
+        </a:xfrm>
+      </p:grpSpPr>
+      <p:sp>
+        <p:nvSpPr>
+          <p:cNvPr id="2" name="Titre 1">
+            <a:extLst>
+              <a:ext uri="{FF2B5EF4-FFF2-40B4-BE49-F238E27FC236}">
+                <a16:creationId xmlns:a16="http://schemas.microsoft.com/office/drawing/2014/main" id="{695D17E5-ADD6-860B-1F6C-452D728BECAD}"/>
+              </a:ext>
+            </a:extLst>
+          </p:cNvPr>
+          <p:cNvSpPr>
+            <a:spLocks noGrp="1"/>
+          </p:cNvSpPr>
+          <p:nvPr>
+            <p:ph type="title"/>
+          </p:nvPr>
+        </p:nvSpPr>
+        <p:spPr/>
+        <p:txBody>
+          <a:bodyPr/>
+          <a:lstStyle/>
+          <a:p>
+            <a:endParaRPr lang="fr-FR"/>
+          </a:p>
+        </p:txBody>
+      </p:sp>
+      <p:sp>
+        <p:nvSpPr>
+          <p:cNvPr id="3" name="Espace réservé du contenu 2">
+            <a:extLst>
+              <a:ext uri="{FF2B5EF4-FFF2-40B4-BE49-F238E27FC236}">
+                <a16:creationId xmlns:a16="http://schemas.microsoft.com/office/drawing/2014/main" id="{00E30818-71FD-9433-9C1C-A5861A31C756}"/>
+              </a:ext>
+            </a:extLst>
+          </p:cNvPr>
+          <p:cNvSpPr>
+            <a:spLocks noGrp="1"/>
+          </p:cNvSpPr>
+          <p:nvPr>
+            <p:ph idx="1"/>
+          </p:nvPr>
+        </p:nvSpPr>
+        <p:spPr/>
+        <p:txBody>
+          <a:bodyPr/>
+          <a:lstStyle/>
+          <a:p>
+            <a:endParaRPr lang="fr-FR"/>
+          </a:p>
+        </p:txBody>
+      </p:sp>
+      <p:sp>
+        <p:nvSpPr>
+          <p:cNvPr id="4" name="Espace réservé du numéro de diapositive 3">
+            <a:extLst>
+              <a:ext uri="{FF2B5EF4-FFF2-40B4-BE49-F238E27FC236}">
+                <a16:creationId xmlns:a16="http://schemas.microsoft.com/office/drawing/2014/main" id="{23979A74-28C4-452A-07CD-B26F8E015BEE}"/>
+              </a:ext>
+            </a:extLst>
+          </p:cNvPr>
+          <p:cNvSpPr>
+            <a:spLocks noGrp="1"/>
+          </p:cNvSpPr>
+          <p:nvPr>
+            <p:ph type="sldNum" sz="quarter" idx="12"/>
+          </p:nvPr>
+        </p:nvSpPr>
+        <p:spPr/>
+        <p:txBody>
+          <a:bodyPr/>
+          <a:lstStyle/>
+          <a:p>
+            <a:fld id="{B7A6A38F-5C8E-497F-8761-3C4E0EEEA33A}" type="slidenum">
+              <a:rPr lang="fr-FR" smtClean="0"/>
+              <a:t>13</a:t>
+            </a:fld>
+            <a:endParaRPr lang="fr-FR"/>
+          </a:p>
+        </p:txBody>
+      </p:sp>
+    </p:spTree>
+    <p:extLst>
+      <p:ext uri="{BB962C8B-B14F-4D97-AF65-F5344CB8AC3E}">
+        <p14:creationId xmlns:p14="http://schemas.microsoft.com/office/powerpoint/2010/main" val="437361997"/>
       </p:ext>
     </p:extLst>
   </p:cSld>
@@ -18274,7 +18424,7 @@
         </p:nvGrpSpPr>
         <p:grpSpPr>
           <a:xfrm>
-            <a:off x="1596905" y="3874910"/>
+            <a:off x="527330" y="3943694"/>
             <a:ext cx="360000" cy="360000"/>
             <a:chOff x="4197400" y="3547713"/>
             <a:chExt cx="1800000" cy="1800000"/>
@@ -20235,14 +20385,11 @@
                 <a:pPr/>
                 <a14:m>
                   <m:oMathPara xmlns:m="http://schemas.openxmlformats.org/officeDocument/2006/math">
-                    <m:oMathParaPr>
-                      <m:jc m:val="centerGroup"/>
-                    </m:oMathParaPr>
-                    <m:oMath xmlns:m="http://schemas.openxmlformats.org/officeDocument/2006/math">
+                    <m:oMath>
                       <m:sSub>
                         <m:sSubPr>
                           <m:ctrlPr>
-                            <a:rPr lang="fr-FR" sz="1050" b="0" i="1" smtClean="0">
+                            <a:rPr lang="fr-FR" sz="1050" i="1" smtClean="0">
                               <a:latin typeface="Cambria Math" panose="02040503050406030204" pitchFamily="18" charset="0"/>
                               <a:ea typeface="Cambria Math" panose="02040503050406030204" pitchFamily="18" charset="0"/>
                             </a:rPr>
@@ -20355,14 +20502,11 @@
                 <a:pPr/>
                 <a14:m>
                   <m:oMathPara xmlns:m="http://schemas.openxmlformats.org/officeDocument/2006/math">
-                    <m:oMathParaPr>
-                      <m:jc m:val="centerGroup"/>
-                    </m:oMathParaPr>
-                    <m:oMath xmlns:m="http://schemas.openxmlformats.org/officeDocument/2006/math">
+                    <m:oMath>
                       <m:sSub>
                         <m:sSubPr>
                           <m:ctrlPr>
-                            <a:rPr lang="fr-FR" sz="1050" b="0" i="1" smtClean="0">
+                            <a:rPr lang="fr-FR" sz="1050" i="1" smtClean="0">
                               <a:latin typeface="Cambria Math" panose="02040503050406030204" pitchFamily="18" charset="0"/>
                               <a:ea typeface="Cambria Math" panose="02040503050406030204" pitchFamily="18" charset="0"/>
                             </a:rPr>
@@ -20475,14 +20619,11 @@
                 <a:pPr/>
                 <a14:m>
                   <m:oMathPara xmlns:m="http://schemas.openxmlformats.org/officeDocument/2006/math">
-                    <m:oMathParaPr>
-                      <m:jc m:val="centerGroup"/>
-                    </m:oMathParaPr>
-                    <m:oMath xmlns:m="http://schemas.openxmlformats.org/officeDocument/2006/math">
+                    <m:oMath>
                       <m:sSub>
                         <m:sSubPr>
                           <m:ctrlPr>
-                            <a:rPr lang="fr-FR" sz="1050" b="0" i="1" smtClean="0">
+                            <a:rPr lang="fr-FR" sz="1050" i="1" smtClean="0">
                               <a:latin typeface="Cambria Math" panose="02040503050406030204" pitchFamily="18" charset="0"/>
                               <a:ea typeface="Cambria Math" panose="02040503050406030204" pitchFamily="18" charset="0"/>
                             </a:rPr>
@@ -20545,7 +20686,7 @@
                       <m:sSub>
                         <m:sSubPr>
                           <m:ctrlPr>
-                            <a:rPr lang="fr-FR" sz="1050" b="0" i="1" smtClean="0">
+                            <a:rPr lang="fr-FR" sz="1050" b="0" i="0" smtClean="0">
                               <a:latin typeface="Cambria Math" panose="02040503050406030204" pitchFamily="18" charset="0"/>
                               <a:ea typeface="Cambria Math" panose="02040503050406030204" pitchFamily="18" charset="0"/>
                             </a:rPr>
@@ -20649,14 +20790,11 @@
                 <a:pPr/>
                 <a14:m>
                   <m:oMathPara xmlns:m="http://schemas.openxmlformats.org/officeDocument/2006/math">
-                    <m:oMathParaPr>
-                      <m:jc m:val="centerGroup"/>
-                    </m:oMathParaPr>
-                    <m:oMath xmlns:m="http://schemas.openxmlformats.org/officeDocument/2006/math">
+                    <m:oMath>
                       <m:sSub>
                         <m:sSubPr>
                           <m:ctrlPr>
-                            <a:rPr lang="fr-FR" sz="1050" b="0" i="1" smtClean="0">
+                            <a:rPr lang="fr-FR" sz="1050" i="1" smtClean="0">
                               <a:latin typeface="Cambria Math" panose="02040503050406030204" pitchFamily="18" charset="0"/>
                               <a:ea typeface="Cambria Math" panose="02040503050406030204" pitchFamily="18" charset="0"/>
                             </a:rPr>
@@ -20719,7 +20857,7 @@
                       <m:sSub>
                         <m:sSubPr>
                           <m:ctrlPr>
-                            <a:rPr lang="fr-FR" sz="1050" b="0" i="1" smtClean="0">
+                            <a:rPr lang="fr-FR" sz="1050" b="0" i="0" smtClean="0">
                               <a:latin typeface="Cambria Math" panose="02040503050406030204" pitchFamily="18" charset="0"/>
                               <a:ea typeface="Cambria Math" panose="02040503050406030204" pitchFamily="18" charset="0"/>
                             </a:rPr>
@@ -30929,109 +31067,6 @@
           </a:fontRef>
         </p:style>
       </p:cxnSp>
-      <p:grpSp>
-        <p:nvGrpSpPr>
-          <p:cNvPr id="25" name="Groupe 24">
-            <a:extLst>
-              <a:ext uri="{FF2B5EF4-FFF2-40B4-BE49-F238E27FC236}">
-                <a16:creationId xmlns:a16="http://schemas.microsoft.com/office/drawing/2014/main" id="{F7A18018-C728-6B01-3037-0421AF781FBB}"/>
-              </a:ext>
-            </a:extLst>
-          </p:cNvPr>
-          <p:cNvGrpSpPr/>
-          <p:nvPr/>
-        </p:nvGrpSpPr>
-        <p:grpSpPr>
-          <a:xfrm>
-            <a:off x="1596905" y="3760610"/>
-            <a:ext cx="360000" cy="360000"/>
-            <a:chOff x="4197400" y="3547713"/>
-            <a:chExt cx="1800000" cy="1800000"/>
-          </a:xfrm>
-        </p:grpSpPr>
-        <p:sp>
-          <p:nvSpPr>
-            <p:cNvPr id="26" name="Ellipse 25">
-              <a:extLst>
-                <a:ext uri="{FF2B5EF4-FFF2-40B4-BE49-F238E27FC236}">
-                  <a16:creationId xmlns:a16="http://schemas.microsoft.com/office/drawing/2014/main" id="{AF615AC5-8CF6-FF34-1EF7-5C5D2FE5B9E8}"/>
-                </a:ext>
-              </a:extLst>
-            </p:cNvPr>
-            <p:cNvSpPr/>
-            <p:nvPr/>
-          </p:nvSpPr>
-          <p:spPr>
-            <a:xfrm>
-              <a:off x="4197400" y="3547713"/>
-              <a:ext cx="1800000" cy="1800000"/>
-            </a:xfrm>
-            <a:prstGeom prst="ellipse">
-              <a:avLst/>
-            </a:prstGeom>
-            <a:solidFill>
-              <a:srgbClr val="FFB25A"/>
-            </a:solidFill>
-            <a:ln>
-              <a:noFill/>
-            </a:ln>
-          </p:spPr>
-          <p:style>
-            <a:lnRef idx="2">
-              <a:schemeClr val="accent1">
-                <a:shade val="50000"/>
-              </a:schemeClr>
-            </a:lnRef>
-            <a:fillRef idx="1">
-              <a:schemeClr val="accent1"/>
-            </a:fillRef>
-            <a:effectRef idx="0">
-              <a:schemeClr val="accent1"/>
-            </a:effectRef>
-            <a:fontRef idx="minor">
-              <a:schemeClr val="lt1"/>
-            </a:fontRef>
-          </p:style>
-          <p:txBody>
-            <a:bodyPr rtlCol="0" anchor="ctr"/>
-            <a:lstStyle/>
-            <a:p>
-              <a:pPr algn="ctr"/>
-              <a:endParaRPr lang="fr-FR"/>
-            </a:p>
-          </p:txBody>
-        </p:sp>
-        <p:pic>
-          <p:nvPicPr>
-            <p:cNvPr id="27" name="Image 26">
-              <a:extLst>
-                <a:ext uri="{FF2B5EF4-FFF2-40B4-BE49-F238E27FC236}">
-                  <a16:creationId xmlns:a16="http://schemas.microsoft.com/office/drawing/2014/main" id="{D99F6707-A222-D5E1-C4A9-E878E9F04E6C}"/>
-                </a:ext>
-              </a:extLst>
-            </p:cNvPr>
-            <p:cNvPicPr>
-              <a:picLocks noChangeAspect="1"/>
-            </p:cNvPicPr>
-            <p:nvPr/>
-          </p:nvPicPr>
-          <p:blipFill>
-            <a:blip r:embed="rId4"/>
-            <a:stretch>
-              <a:fillRect/>
-            </a:stretch>
-          </p:blipFill>
-          <p:spPr>
-            <a:xfrm>
-              <a:off x="4526157" y="3876470"/>
-              <a:ext cx="1142486" cy="1142486"/>
-            </a:xfrm>
-            <a:prstGeom prst="rect">
-              <a:avLst/>
-            </a:prstGeom>
-          </p:spPr>
-        </p:pic>
-      </p:grpSp>
       <p:pic>
         <p:nvPicPr>
           <p:cNvPr id="28" name="Image 27">
@@ -31047,7 +31082,7 @@
           <p:nvPr/>
         </p:nvPicPr>
         <p:blipFill>
-          <a:blip r:embed="rId5"/>
+          <a:blip r:embed="rId4"/>
           <a:stretch>
             <a:fillRect/>
           </a:stretch>
@@ -31077,7 +31112,7 @@
           <p:nvPr/>
         </p:nvPicPr>
         <p:blipFill>
-          <a:blip r:embed="rId5"/>
+          <a:blip r:embed="rId4"/>
           <a:stretch>
             <a:fillRect/>
           </a:stretch>
@@ -31151,7 +31186,7 @@
           <p:nvPr/>
         </p:nvPicPr>
         <p:blipFill>
-          <a:blip r:embed="rId5"/>
+          <a:blip r:embed="rId4"/>
           <a:stretch>
             <a:fillRect/>
           </a:stretch>
@@ -31225,7 +31260,7 @@
           <p:nvPr/>
         </p:nvPicPr>
         <p:blipFill>
-          <a:blip r:embed="rId6"/>
+          <a:blip r:embed="rId5"/>
           <a:stretch>
             <a:fillRect/>
           </a:stretch>
@@ -31653,7 +31688,7 @@
             <p:nvPr/>
           </p:nvPicPr>
           <p:blipFill>
-            <a:blip r:embed="rId7"/>
+            <a:blip r:embed="rId6"/>
             <a:stretch>
               <a:fillRect/>
             </a:stretch>
@@ -32168,10 +32203,7 @@
                 <a:pPr algn="ctr"/>
                 <a14:m>
                   <m:oMathPara xmlns:m="http://schemas.openxmlformats.org/officeDocument/2006/math">
-                    <m:oMathParaPr>
-                      <m:jc m:val="centerGroup"/>
-                    </m:oMathParaPr>
-                    <m:oMath xmlns:m="http://schemas.openxmlformats.org/officeDocument/2006/math">
+                    <m:oMath>
                       <m:r>
                         <a:rPr lang="fr-FR" sz="1200" b="1" i="1" smtClean="0">
                           <a:solidFill>
@@ -32578,10 +32610,7 @@
                 <a:pPr algn="ctr"/>
                 <a14:m>
                   <m:oMathPara xmlns:m="http://schemas.openxmlformats.org/officeDocument/2006/math">
-                    <m:oMathParaPr>
-                      <m:jc m:val="centerGroup"/>
-                    </m:oMathParaPr>
-                    <m:oMath xmlns:m="http://schemas.openxmlformats.org/officeDocument/2006/math">
+                    <m:oMath>
                       <m:r>
                         <a:rPr lang="fr-FR" sz="1200" b="1" i="1" smtClean="0">
                           <a:solidFill>
@@ -33300,7 +33329,7 @@
           <p:nvPr/>
         </p:nvPicPr>
         <p:blipFill>
-          <a:blip r:embed="rId6"/>
+          <a:blip r:embed="rId5"/>
           <a:stretch>
             <a:fillRect/>
           </a:stretch>
@@ -33348,10 +33377,7 @@
                 <a:pPr/>
                 <a14:m>
                   <m:oMathPara xmlns:m="http://schemas.openxmlformats.org/officeDocument/2006/math">
-                    <m:oMathParaPr>
-                      <m:jc m:val="centerGroup"/>
-                    </m:oMathParaPr>
-                    <m:oMath xmlns:m="http://schemas.openxmlformats.org/officeDocument/2006/math">
+                    <m:oMath>
                       <m:r>
                         <a:rPr lang="fr-FR" sz="1100" b="1" i="1" smtClean="0">
                           <a:solidFill>
@@ -33681,10 +33707,7 @@
                 <a:pPr/>
                 <a14:m>
                   <m:oMathPara xmlns:m="http://schemas.openxmlformats.org/officeDocument/2006/math">
-                    <m:oMathParaPr>
-                      <m:jc m:val="centerGroup"/>
-                    </m:oMathParaPr>
-                    <m:oMath xmlns:m="http://schemas.openxmlformats.org/officeDocument/2006/math">
+                    <m:oMath>
                       <m:r>
                         <a:rPr lang="fr-FR" sz="1100" b="1" i="1" smtClean="0">
                           <a:solidFill>
@@ -33828,6 +33851,109 @@
           </p:sp>
         </mc:Fallback>
       </mc:AlternateContent>
+      <p:grpSp>
+        <p:nvGrpSpPr>
+          <p:cNvPr id="25" name="Groupe 24">
+            <a:extLst>
+              <a:ext uri="{FF2B5EF4-FFF2-40B4-BE49-F238E27FC236}">
+                <a16:creationId xmlns:a16="http://schemas.microsoft.com/office/drawing/2014/main" id="{F7A18018-C728-6B01-3037-0421AF781FBB}"/>
+              </a:ext>
+            </a:extLst>
+          </p:cNvPr>
+          <p:cNvGrpSpPr/>
+          <p:nvPr/>
+        </p:nvGrpSpPr>
+        <p:grpSpPr>
+          <a:xfrm>
+            <a:off x="545470" y="4032360"/>
+            <a:ext cx="360000" cy="360000"/>
+            <a:chOff x="4197400" y="3547713"/>
+            <a:chExt cx="1800000" cy="1800000"/>
+          </a:xfrm>
+        </p:grpSpPr>
+        <p:sp>
+          <p:nvSpPr>
+            <p:cNvPr id="26" name="Ellipse 25">
+              <a:extLst>
+                <a:ext uri="{FF2B5EF4-FFF2-40B4-BE49-F238E27FC236}">
+                  <a16:creationId xmlns:a16="http://schemas.microsoft.com/office/drawing/2014/main" id="{AF615AC5-8CF6-FF34-1EF7-5C5D2FE5B9E8}"/>
+                </a:ext>
+              </a:extLst>
+            </p:cNvPr>
+            <p:cNvSpPr/>
+            <p:nvPr/>
+          </p:nvSpPr>
+          <p:spPr>
+            <a:xfrm>
+              <a:off x="4197400" y="3547713"/>
+              <a:ext cx="1800000" cy="1800000"/>
+            </a:xfrm>
+            <a:prstGeom prst="ellipse">
+              <a:avLst/>
+            </a:prstGeom>
+            <a:solidFill>
+              <a:srgbClr val="FFB25A"/>
+            </a:solidFill>
+            <a:ln>
+              <a:noFill/>
+            </a:ln>
+          </p:spPr>
+          <p:style>
+            <a:lnRef idx="2">
+              <a:schemeClr val="accent1">
+                <a:shade val="50000"/>
+              </a:schemeClr>
+            </a:lnRef>
+            <a:fillRef idx="1">
+              <a:schemeClr val="accent1"/>
+            </a:fillRef>
+            <a:effectRef idx="0">
+              <a:schemeClr val="accent1"/>
+            </a:effectRef>
+            <a:fontRef idx="minor">
+              <a:schemeClr val="lt1"/>
+            </a:fontRef>
+          </p:style>
+          <p:txBody>
+            <a:bodyPr rtlCol="0" anchor="ctr"/>
+            <a:lstStyle/>
+            <a:p>
+              <a:pPr algn="ctr"/>
+              <a:endParaRPr lang="fr-FR"/>
+            </a:p>
+          </p:txBody>
+        </p:sp>
+        <p:pic>
+          <p:nvPicPr>
+            <p:cNvPr id="27" name="Image 26">
+              <a:extLst>
+                <a:ext uri="{FF2B5EF4-FFF2-40B4-BE49-F238E27FC236}">
+                  <a16:creationId xmlns:a16="http://schemas.microsoft.com/office/drawing/2014/main" id="{D99F6707-A222-D5E1-C4A9-E878E9F04E6C}"/>
+                </a:ext>
+              </a:extLst>
+            </p:cNvPr>
+            <p:cNvPicPr>
+              <a:picLocks noChangeAspect="1"/>
+            </p:cNvPicPr>
+            <p:nvPr/>
+          </p:nvPicPr>
+          <p:blipFill>
+            <a:blip r:embed="rId20"/>
+            <a:stretch>
+              <a:fillRect/>
+            </a:stretch>
+          </p:blipFill>
+          <p:spPr>
+            <a:xfrm>
+              <a:off x="4526157" y="3876470"/>
+              <a:ext cx="1142486" cy="1142486"/>
+            </a:xfrm>
+            <a:prstGeom prst="rect">
+              <a:avLst/>
+            </a:prstGeom>
+          </p:spPr>
+        </p:pic>
+      </p:grpSp>
     </p:spTree>
     <p:extLst>
       <p:ext uri="{BB962C8B-B14F-4D97-AF65-F5344CB8AC3E}">
